--- a/lecons/F2T/20_S14_L5_P1_Sectors_Introduction.pptx
+++ b/lecons/F2T/20_S14_L5_P1_Sectors_Introduction.pptx
@@ -56,10 +56,9 @@
     <p:sldId id="304" r:id="rId50"/>
     <p:sldId id="305" r:id="rId51"/>
     <p:sldId id="306" r:id="rId52"/>
-    <p:sldId id="307" r:id="rId53"/>
   </p:sldIdLst>
   <p:notesMasterIdLst>
-    <p:notesMasterId r:id="rId54"/>
+    <p:notesMasterId r:id="rId53"/>
   </p:notesMasterIdLst>
   <p:sldSz cx="12192000" cy="6858000"/>
   <p:notesSz cx="6858000" cy="12192000"/>
@@ -641,7 +640,7 @@
           <a:p>
             <a:r>
               <a:rPr lang="en-US" dirty="0"/>
-              <a:t>Listen carefully to this situation from real life. Ahmadou's father grows cotton near Garoua. His uncle works in the CICAM factory, where cotton becomes cloth. His aunt sells cloth in the market. His cousin looks for better cotton seeds in a research centre. Think about it, because I am going to ask you some questions.</a:t>
+              <a:t>Listen carefully to this situation from real life. Ahmadou's father grows cotton near Garoua. His uncle works in the CICAM factory, where cotton becomes cloth, his aunt sells cloth in the market, and his cousin looks for better cotton seeds in a research centre. Ahmadou asks: "How can we group all these different jobs?" Think about it, because I am going to ask you some questions.</a:t>
             </a:r>
             <a:endParaRPr lang="en-US" dirty="0"/>
           </a:p>
@@ -817,7 +816,7 @@
           <a:p>
             <a:r>
               <a:rPr lang="en-US" dirty="0"/>
-              <a:t>Good. Ahmadou does not know how to group the jobs of his family.</a:t>
+              <a:t>Good. Ahmadou does not know how economic activities are grouped into sectors.</a:t>
             </a:r>
             <a:endParaRPr lang="en-US" dirty="0"/>
           </a:p>
@@ -905,7 +904,7 @@
           <a:p>
             <a:r>
               <a:rPr lang="en-US" dirty="0"/>
-              <a:t>Question 2: Who works with cotton first? Think for a moment, then raise your hand to answer.</a:t>
+              <a:t>Question 2: What does the father do? Think for a moment, then raise your hand to answer.</a:t>
             </a:r>
             <a:endParaRPr lang="en-US" dirty="0"/>
           </a:p>
@@ -993,7 +992,7 @@
           <a:p>
             <a:r>
               <a:rPr lang="en-US" dirty="0"/>
-              <a:t>Good. His father, who grows it.</a:t>
+              <a:t>Good. He grows cotton.</a:t>
             </a:r>
             <a:endParaRPr lang="en-US" dirty="0"/>
           </a:p>
@@ -1081,7 +1080,7 @@
           <a:p>
             <a:r>
               <a:rPr lang="en-US" dirty="0"/>
-              <a:t>Question 3: What links all these jobs? Think for a moment, then raise your hand to answer.</a:t>
+              <a:t>Question 3: What does the uncle do? Think for a moment, then raise your hand to answer.</a:t>
             </a:r>
             <a:endParaRPr lang="en-US" dirty="0"/>
           </a:p>
@@ -1169,7 +1168,7 @@
           <a:p>
             <a:r>
               <a:rPr lang="en-US" dirty="0"/>
-              <a:t>Good. They all work with cotton, one after the other.</a:t>
+              <a:t>Good. He works in a factory that makes cloth.</a:t>
             </a:r>
             <a:endParaRPr lang="en-US" dirty="0"/>
           </a:p>
@@ -1433,7 +1432,7 @@
           <a:p>
             <a:r>
               <a:rPr lang="en-US" dirty="0"/>
-              <a:t>Activity 1. Look carefully at this picture: a tailor at work. Observe every detail before I ask the question.</a:t>
+              <a:t>Activity 1. Look carefully at this picture: a tailor makes a dress. Observe every detail before I ask the question.</a:t>
             </a:r>
             <a:endParaRPr lang="en-US" dirty="0"/>
           </a:p>
@@ -1609,7 +1608,7 @@
           <a:p>
             <a:r>
               <a:rPr lang="en-US" dirty="0"/>
-              <a:t>Here is the question for Activity 1: The tailor makes a dress. Can we touch it? Is it a good or a service? Take one minute to think and write your answer in your rough notebook.</a:t>
+              <a:t>Here is the question for Activity 1: We can touch the dress. Is it a good or a service? Take one minute to think and write your answer in your rough notebook.</a:t>
             </a:r>
             <a:endParaRPr lang="en-US" dirty="0"/>
           </a:p>
@@ -1697,7 +1696,7 @@
           <a:p>
             <a:r>
               <a:rPr lang="en-US" dirty="0"/>
-              <a:t>Let us check the answer together. Yes, we can touch it. It is a good.</a:t>
+              <a:t>Let us check the answer together. A good.</a:t>
             </a:r>
             <a:endParaRPr lang="en-US" dirty="0"/>
           </a:p>
@@ -1785,7 +1784,7 @@
           <a:p>
             <a:r>
               <a:rPr lang="en-US" dirty="0"/>
-              <a:t>Activity 2. Look carefully at this picture: a health worker with a patient. Observe every detail before I ask the question.</a:t>
+              <a:t>Activity 2. Look carefully at this picture: a doctor treats a patient. Observe every detail before I ask the question.</a:t>
             </a:r>
             <a:endParaRPr lang="en-US" dirty="0"/>
           </a:p>
@@ -1873,7 +1872,7 @@
           <a:p>
             <a:r>
               <a:rPr lang="en-US" dirty="0"/>
-              <a:t>Here is the question for Activity 2: The doctor treats a patient. Is this a good or a service? Take one minute to think and write your answer in your rough notebook.</a:t>
+              <a:t>Here is the question for Activity 2: Is the work of the doctor a good or a service? Take one minute to think and write your answer in your rough notebook.</a:t>
             </a:r>
             <a:endParaRPr lang="en-US" dirty="0"/>
           </a:p>
@@ -1961,7 +1960,7 @@
           <a:p>
             <a:r>
               <a:rPr lang="en-US" dirty="0"/>
-              <a:t>Let us check the answer together. A service: work done for other people.</a:t>
+              <a:t>Let us check the answer together. A service.</a:t>
             </a:r>
             <a:endParaRPr lang="en-US" dirty="0"/>
           </a:p>
@@ -2049,7 +2048,7 @@
           <a:p>
             <a:r>
               <a:rPr lang="en-US" dirty="0"/>
-              <a:t>Activity 3. Look carefully at this picture: raw cotton after the harvest. Observe every detail before I ask the question.</a:t>
+              <a:t>Activity 3. Look carefully at this picture: raw cotton. Observe every detail before I ask the question.</a:t>
             </a:r>
             <a:endParaRPr lang="en-US" dirty="0"/>
           </a:p>
@@ -2401,7 +2400,7 @@
           <a:p>
             <a:r>
               <a:rPr lang="en-US" dirty="0"/>
-              <a:t>Here is the question for Activity 4: Name the four sectors in the order of the journey of cotton. Take one minute to think and write your answer in your rough notebook.</a:t>
+              <a:t>Here is the question for Activity 4: Which sector comes first in the journey of cotton? Take one minute to think and write your answer in your rough notebook.</a:t>
             </a:r>
             <a:endParaRPr lang="en-US" dirty="0"/>
           </a:p>
@@ -2577,7 +2576,7 @@
           <a:p>
             <a:r>
               <a:rPr lang="en-US" dirty="0"/>
-              <a:t>Let us check the answer together. Primary, secondary, tertiary and quaternary.</a:t>
+              <a:t>Let us check the answer together. The primary sector (growing cotton).</a:t>
             </a:r>
             <a:endParaRPr lang="en-US" dirty="0"/>
           </a:p>
@@ -2665,7 +2664,7 @@
           <a:p>
             <a:r>
               <a:rPr lang="en-US" dirty="0"/>
-              <a:t>Activity 5. Look carefully at this picture: a scientist in a laboratory. Observe every detail before I ask the question.</a:t>
+              <a:t>Activity 5. Look carefully at this picture: a researcher. Observe every detail before I ask the question.</a:t>
             </a:r>
             <a:endParaRPr lang="en-US" dirty="0"/>
           </a:p>
@@ -2753,7 +2752,7 @@
           <a:p>
             <a:r>
               <a:rPr lang="en-US" dirty="0"/>
-              <a:t>Here is the question for Activity 5: Ahmadou's cousin looks for better seeds. In which sector does she work? Take one minute to think and write your answer in your rough notebook.</a:t>
+              <a:t>Here is the question for Activity 5: In which sector does a researcher work? Take one minute to think and write your answer in your rough notebook.</a:t>
             </a:r>
             <a:endParaRPr lang="en-US" dirty="0"/>
           </a:p>
@@ -3017,7 +3016,7 @@
           <a:p>
             <a:r>
               <a:rPr lang="en-US" dirty="0"/>
-              <a:t>Let us copy the definitions. The key terms of this lesson are defined as follows. On this slide we have Economy and Goods. Write each point on a new line, with the key term first, and explain it in your own words when we revise. When you finish, we go to the next slide.</a:t>
+              <a:t>Let us copy the definitions. The key terms of this lesson are defined as follows. On this slide we have Economy and Economic activity. Write each point on a new line, with the key term first, and explain it in your own words when we revise. When you finish, we go to the next slide.</a:t>
             </a:r>
             <a:endParaRPr lang="en-US" dirty="0"/>
           </a:p>
@@ -3105,7 +3104,7 @@
           <a:p>
             <a:r>
               <a:rPr lang="en-US" dirty="0"/>
-              <a:t>We continue with the definitions. On this slide we have Services, Raw material and Sector. Write each point on a new line, with the key term first, and explain it in your own words when we revise.</a:t>
+              <a:t>We continue with the definitions. On this slide we have Goods, Services and Sector of the economy. Write each point on a new line, with the key term first, and explain it in your own words when we revise.</a:t>
             </a:r>
             <a:endParaRPr lang="en-US" dirty="0"/>
           </a:p>
@@ -3193,7 +3192,7 @@
           <a:p>
             <a:r>
               <a:rPr lang="en-US" dirty="0"/>
-              <a:t>Let us copy The Four Sectors of the Economy. The economy is divided into four sectors. On this slide we have Primary sector and Secondary sector. Write each point on a new line, with the key term first, and explain it in your own words when we revise. When you finish, we go to the next slide.</a:t>
+              <a:t>Let us copy Key Concepts: The Four Sectors. Economic activities are grouped into four sectors. Copy the point on Primary sector on the left, then draw the diagram on the right: the journey of cotton. Give it a title and label it clearly.</a:t>
             </a:r>
             <a:endParaRPr lang="en-US" dirty="0"/>
           </a:p>
@@ -3281,7 +3280,7 @@
           <a:p>
             <a:r>
               <a:rPr lang="en-US" dirty="0"/>
-              <a:t>We continue with The Four Sectors of the Economy. On this slide we have Tertiary sector and Quaternary sector. Write each point on a new line, with the key term first, and explain it in your own words when we revise.</a:t>
+              <a:t>We continue with Key Concepts: The Four Sectors. On this slide we have Secondary sector and Tertiary sector. Write each point on a new line, with the key term first, and explain it in your own words when we revise.</a:t>
             </a:r>
             <a:endParaRPr lang="en-US" dirty="0"/>
           </a:p>
@@ -3369,7 +3368,7 @@
           <a:p>
             <a:r>
               <a:rPr lang="en-US" dirty="0"/>
-              <a:t>Now draw this illustration in your notebook: the journey of cotton through the sectors. Give it a title and label it clearly.</a:t>
+              <a:t>Copy the point on Quaternary sector on the left, then draw the diagram on the right: a researcher. Give it a title and label it clearly.</a:t>
             </a:r>
             <a:endParaRPr lang="en-US" dirty="0"/>
           </a:p>
@@ -4513,7 +4512,7 @@
           <a:p>
             <a:r>
               <a:rPr lang="en-US" dirty="0"/>
-              <a:t>Take your time to copy this part; we will continue together.</a:t>
+              <a:t>This slide is for me, the teacher: it gives the timing of the lesson and what to do if the projector is not available.</a:t>
             </a:r>
             <a:endParaRPr lang="en-US" dirty="0"/>
           </a:p>
@@ -4601,7 +4600,7 @@
           <a:p>
             <a:r>
               <a:rPr lang="en-US" dirty="0"/>
-              <a:t>This slide is for me, the teacher: it gives the timing of the lesson and what to do if the projector is not available.</a:t>
+              <a:t>These are the references and picture credits used to prepare this lesson.</a:t>
             </a:r>
             <a:endParaRPr lang="en-US" dirty="0"/>
           </a:p>
@@ -4625,94 +4624,6 @@
             <a:fld id="{F7021451-1387-4CA6-816F-3879F97B5CBC}" type="slidenum">
               <a:rPr lang="en-US"/>
               <a:t>51</a:t>
-            </a:fld>
-            <a:endParaRPr lang="en-US"/>
-          </a:p>
-        </p:txBody>
-      </p:sp>
-    </p:spTree>
-    <p:extLst>
-      <p:ext uri="{BB962C8B-B14F-4D97-AF65-F5344CB8AC3E}">
-        <p14:creationId xmlns:p14="http://schemas.microsoft.com/office/powerpoint/2010/main" val="1024086991"/>
-      </p:ext>
-    </p:extLst>
-  </p:cSld>
-  <p:clrMapOvr>
-    <a:masterClrMapping/>
-  </p:clrMapOvr>
-</p:notes>
-</file>
-
-<file path=ppt/notesSlides/notesSlide52.xml><?xml version="1.0" encoding="utf-8"?>
-<p:notes xmlns:a="http://schemas.openxmlformats.org/drawingml/2006/main" xmlns:r="http://schemas.openxmlformats.org/officeDocument/2006/relationships" xmlns:p="http://schemas.openxmlformats.org/presentationml/2006/main">
-  <p:cSld>
-    <p:spTree>
-      <p:nvGrpSpPr>
-        <p:cNvPr id="1" name=""/>
-        <p:cNvGrpSpPr/>
-        <p:nvPr/>
-      </p:nvGrpSpPr>
-      <p:grpSpPr>
-        <a:xfrm>
-          <a:off x="0" y="0"/>
-          <a:ext cx="0" cy="0"/>
-          <a:chOff x="0" y="0"/>
-          <a:chExt cx="0" cy="0"/>
-        </a:xfrm>
-      </p:grpSpPr>
-      <p:sp>
-        <p:nvSpPr>
-          <p:cNvPr id="2" name="Slide Image Placeholder 1"/>
-          <p:cNvSpPr>
-            <a:spLocks noGrp="1" noRot="1" noChangeAspect="1"/>
-          </p:cNvSpPr>
-          <p:nvPr>
-            <p:ph type="sldImg"/>
-          </p:nvPr>
-        </p:nvSpPr>
-        <p:spPr/>
-      </p:sp>
-      <p:sp>
-        <p:nvSpPr>
-          <p:cNvPr id="3" name="Notes Placeholder 2"/>
-          <p:cNvSpPr>
-            <a:spLocks noGrp="1"/>
-          </p:cNvSpPr>
-          <p:nvPr>
-            <p:ph type="body" idx="1"/>
-          </p:nvPr>
-        </p:nvSpPr>
-        <p:spPr/>
-        <p:txBody>
-          <a:bodyPr/>
-          <a:lstStyle/>
-          <a:p>
-            <a:r>
-              <a:rPr lang="en-US" dirty="0"/>
-              <a:t>These are the references and picture credits used to prepare this lesson.</a:t>
-            </a:r>
-            <a:endParaRPr lang="en-US" dirty="0"/>
-          </a:p>
-        </p:txBody>
-      </p:sp>
-      <p:sp>
-        <p:nvSpPr>
-          <p:cNvPr id="4" name="Slide Number Placeholder 3"/>
-          <p:cNvSpPr>
-            <a:spLocks noGrp="1"/>
-          </p:cNvSpPr>
-          <p:nvPr>
-            <p:ph type="sldNum" sz="quarter" idx="10"/>
-          </p:nvPr>
-        </p:nvSpPr>
-        <p:spPr/>
-        <p:txBody>
-          <a:bodyPr/>
-          <a:lstStyle/>
-          <a:p>
-            <a:fld id="{F7021451-1387-4CA6-816F-3879F97B5CBC}" type="slidenum">
-              <a:rPr lang="en-US"/>
-              <a:t>52</a:t>
             </a:fld>
             <a:endParaRPr lang="en-US"/>
           </a:p>
@@ -6421,7 +6332,7 @@
         <p:spPr>
           <a:xfrm>
             <a:off x="0" y="658368"/>
-            <a:ext cx="3840480" cy="5833872"/>
+            <a:ext cx="2468880" cy="5833872"/>
           </a:xfrm>
           <a:prstGeom prst="rect">
             <a:avLst/>
@@ -6436,8 +6347,8 @@
         </p:nvSpPr>
         <p:spPr>
           <a:xfrm>
-            <a:off x="4069080" y="1005840"/>
-            <a:ext cx="7802575" cy="731520"/>
+            <a:off x="2697480" y="1005840"/>
+            <a:ext cx="9174175" cy="731520"/>
           </a:xfrm>
           <a:prstGeom prst="rect">
             <a:avLst/>
@@ -6477,8 +6388,8 @@
         </p:nvSpPr>
         <p:spPr>
           <a:xfrm>
-            <a:off x="4069080" y="1783080"/>
-            <a:ext cx="7802575" cy="4663440"/>
+            <a:off x="2697480" y="1783080"/>
+            <a:ext cx="9174175" cy="4663440"/>
           </a:xfrm>
           <a:prstGeom prst="rect">
             <a:avLst/>
@@ -6505,7 +6416,7 @@
                 <a:ea typeface="Times New Roman" pitchFamily="34" charset="-122"/>
                 <a:cs typeface="Times New Roman" pitchFamily="34" charset="-120"/>
               </a:rPr>
-              <a:t>Ahmadou's father grows cotton near Garoua. His uncle works in the CICAM factory, where cotton becomes cloth. His aunt sells cloth in the market. His cousin looks for better cotton seeds in a research centre.</a:t>
+              <a:t>Ahmadou's father grows cotton near Garoua. His uncle works in the CICAM factory, where cotton becomes cloth, his aunt sells cloth in the market, and his cousin looks for better cotton seeds in a research centre. Ahmadou asks: "How can we group all these different jobs?"</a:t>
             </a:r>
             <a:endParaRPr lang="en-US" sz="4000" dirty="0"/>
           </a:p>
@@ -6943,7 +6854,7 @@
                 <a:ea typeface="Times New Roman" pitchFamily="34" charset="-122"/>
                 <a:cs typeface="Times New Roman" pitchFamily="34" charset="-120"/>
               </a:rPr>
-              <a:t>Ahmadou does not know how to group the jobs of his family.</a:t>
+              <a:t>Ahmadou does not know how economic activities are grouped into sectors.</a:t>
             </a:r>
             <a:endParaRPr lang="en-US" sz="4000" dirty="0"/>
           </a:p>
@@ -7162,7 +7073,7 @@
                 <a:ea typeface="Times New Roman" pitchFamily="34" charset="-122"/>
                 <a:cs typeface="Times New Roman" pitchFamily="34" charset="-120"/>
               </a:rPr>
-              <a:t>Who works with cotton first?</a:t>
+              <a:t>What does the father do?</a:t>
             </a:r>
             <a:endParaRPr lang="en-US" sz="4000" dirty="0"/>
           </a:p>
@@ -7381,7 +7292,7 @@
                 <a:ea typeface="Times New Roman" pitchFamily="34" charset="-122"/>
                 <a:cs typeface="Times New Roman" pitchFamily="34" charset="-120"/>
               </a:rPr>
-              <a:t>His father, who grows it.</a:t>
+              <a:t>He grows cotton.</a:t>
             </a:r>
             <a:endParaRPr lang="en-US" sz="4000" dirty="0"/>
           </a:p>
@@ -7600,7 +7511,7 @@
                 <a:ea typeface="Times New Roman" pitchFamily="34" charset="-122"/>
                 <a:cs typeface="Times New Roman" pitchFamily="34" charset="-120"/>
               </a:rPr>
-              <a:t>What links all these jobs?</a:t>
+              <a:t>What does the uncle do?</a:t>
             </a:r>
             <a:endParaRPr lang="en-US" sz="4000" dirty="0"/>
           </a:p>
@@ -7819,7 +7730,7 @@
                 <a:ea typeface="Times New Roman" pitchFamily="34" charset="-122"/>
                 <a:cs typeface="Times New Roman" pitchFamily="34" charset="-120"/>
               </a:rPr>
-              <a:t>They all work with cotton, one after the other.</a:t>
+              <a:t>He works in a factory that makes cloth.</a:t>
             </a:r>
             <a:endParaRPr lang="en-US" sz="4000" dirty="0"/>
           </a:p>
@@ -8471,7 +8382,7 @@
                 <a:ea typeface="Times New Roman" pitchFamily="34" charset="-122"/>
                 <a:cs typeface="Times New Roman" pitchFamily="34" charset="-120"/>
               </a:rPr>
-              <a:t>A tailor at work.</a:t>
+              <a:t>A tailor makes a dress.</a:t>
             </a:r>
             <a:endParaRPr lang="en-US" sz="1800" dirty="0"/>
           </a:p>
@@ -9285,7 +9196,7 @@
                 <a:ea typeface="Times New Roman" pitchFamily="34" charset="-122"/>
                 <a:cs typeface="Times New Roman" pitchFamily="34" charset="-120"/>
               </a:rPr>
-              <a:t>The tailor makes a dress. Can we touch it? Is it a good or a service?</a:t>
+              <a:t>We can touch the dress. Is it a good or a service?</a:t>
             </a:r>
             <a:endParaRPr lang="en-US" sz="4000" dirty="0"/>
           </a:p>
@@ -9504,7 +9415,7 @@
                 <a:ea typeface="Times New Roman" pitchFamily="34" charset="-122"/>
                 <a:cs typeface="Times New Roman" pitchFamily="34" charset="-120"/>
               </a:rPr>
-              <a:t>Yes, we can touch it. It is a good.</a:t>
+              <a:t>A good.</a:t>
             </a:r>
             <a:endParaRPr lang="en-US" sz="4000" dirty="0"/>
           </a:p>
@@ -9718,7 +9629,7 @@
                 <a:ea typeface="Times New Roman" pitchFamily="34" charset="-122"/>
                 <a:cs typeface="Times New Roman" pitchFamily="34" charset="-120"/>
               </a:rPr>
-              <a:t>A health worker with a patient.</a:t>
+              <a:t>A doctor treats a patient.</a:t>
             </a:r>
             <a:endParaRPr lang="en-US" sz="1800" dirty="0"/>
           </a:p>
@@ -9937,7 +9848,7 @@
                 <a:ea typeface="Times New Roman" pitchFamily="34" charset="-122"/>
                 <a:cs typeface="Times New Roman" pitchFamily="34" charset="-120"/>
               </a:rPr>
-              <a:t>The doctor treats a patient. Is this a good or a service?</a:t>
+              <a:t>Is the work of the doctor a good or a service?</a:t>
             </a:r>
             <a:endParaRPr lang="en-US" sz="4000" dirty="0"/>
           </a:p>
@@ -10156,7 +10067,7 @@
                 <a:ea typeface="Times New Roman" pitchFamily="34" charset="-122"/>
                 <a:cs typeface="Times New Roman" pitchFamily="34" charset="-120"/>
               </a:rPr>
-              <a:t>A service: work done for other people.</a:t>
+              <a:t>A service.</a:t>
             </a:r>
             <a:endParaRPr lang="en-US" sz="4000" dirty="0"/>
           </a:p>
@@ -10370,7 +10281,7 @@
                 <a:ea typeface="Times New Roman" pitchFamily="34" charset="-122"/>
                 <a:cs typeface="Times New Roman" pitchFamily="34" charset="-120"/>
               </a:rPr>
-              <a:t>Raw cotton after the harvest.</a:t>
+              <a:t>Raw cotton.</a:t>
             </a:r>
             <a:endParaRPr lang="en-US" sz="1800" dirty="0"/>
           </a:p>
@@ -10920,7 +10831,7 @@
                 <a:ea typeface="Calibri" pitchFamily="34" charset="-122"/>
                 <a:cs typeface="Calibri" pitchFamily="34" charset="-120"/>
               </a:rPr>
-              <a:t>1. THE FOUR SECTORS</a:t>
+              <a:t>KEY CONCEPTS</a:t>
             </a:r>
             <a:endParaRPr lang="en-US" sz="1400" dirty="0"/>
           </a:p>
@@ -11134,7 +11045,7 @@
                 <a:ea typeface="Calibri" pitchFamily="34" charset="-122"/>
                 <a:cs typeface="Calibri" pitchFamily="34" charset="-120"/>
               </a:rPr>
-              <a:t>1. THE FOUR SECTORS</a:t>
+              <a:t>KEY CONCEPTS</a:t>
             </a:r>
             <a:endParaRPr lang="en-US" sz="1400" dirty="0"/>
           </a:p>
@@ -11241,7 +11152,7 @@
                 <a:ea typeface="Times New Roman" pitchFamily="34" charset="-122"/>
                 <a:cs typeface="Times New Roman" pitchFamily="34" charset="-120"/>
               </a:rPr>
-              <a:t>Name the four sectors in the order of the journey of cotton.</a:t>
+              <a:t>Which sector comes first in the journey of cotton?</a:t>
             </a:r>
             <a:endParaRPr lang="en-US" sz="4000" dirty="0"/>
           </a:p>
@@ -12362,7 +12273,7 @@
                 <a:ea typeface="Calibri" pitchFamily="34" charset="-122"/>
                 <a:cs typeface="Calibri" pitchFamily="34" charset="-120"/>
               </a:rPr>
-              <a:t>1. THE FOUR SECTORS</a:t>
+              <a:t>KEY CONCEPTS</a:t>
             </a:r>
             <a:endParaRPr lang="en-US" sz="1400" dirty="0"/>
           </a:p>
@@ -12469,7 +12380,7 @@
                 <a:ea typeface="Times New Roman" pitchFamily="34" charset="-122"/>
                 <a:cs typeface="Times New Roman" pitchFamily="34" charset="-120"/>
               </a:rPr>
-              <a:t>Primary, secondary, tertiary and quaternary.</a:t>
+              <a:t>The primary sector (growing cotton).</a:t>
             </a:r>
             <a:endParaRPr lang="en-US" sz="4000" dirty="0"/>
           </a:p>
@@ -12581,7 +12492,7 @@
                 <a:ea typeface="Calibri" pitchFamily="34" charset="-122"/>
                 <a:cs typeface="Calibri" pitchFamily="34" charset="-120"/>
               </a:rPr>
-              <a:t>1. THE FOUR SECTORS</a:t>
+              <a:t>KEY CONCEPTS</a:t>
             </a:r>
             <a:endParaRPr lang="en-US" sz="1400" dirty="0"/>
           </a:p>
@@ -12683,7 +12594,7 @@
                 <a:ea typeface="Times New Roman" pitchFamily="34" charset="-122"/>
                 <a:cs typeface="Times New Roman" pitchFamily="34" charset="-120"/>
               </a:rPr>
-              <a:t>A scientist in a laboratory.</a:t>
+              <a:t>A researcher.</a:t>
             </a:r>
             <a:endParaRPr lang="en-US" sz="1800" dirty="0"/>
           </a:p>
@@ -12795,7 +12706,7 @@
                 <a:ea typeface="Calibri" pitchFamily="34" charset="-122"/>
                 <a:cs typeface="Calibri" pitchFamily="34" charset="-120"/>
               </a:rPr>
-              <a:t>1. THE FOUR SECTORS</a:t>
+              <a:t>KEY CONCEPTS</a:t>
             </a:r>
             <a:endParaRPr lang="en-US" sz="1400" dirty="0"/>
           </a:p>
@@ -12902,7 +12813,7 @@
                 <a:ea typeface="Times New Roman" pitchFamily="34" charset="-122"/>
                 <a:cs typeface="Times New Roman" pitchFamily="34" charset="-120"/>
               </a:rPr>
-              <a:t>Ahmadou's cousin looks for better seeds. In which sector does she work?</a:t>
+              <a:t>In which sector does a researcher work?</a:t>
             </a:r>
             <a:endParaRPr lang="en-US" sz="4000" dirty="0"/>
           </a:p>
@@ -13014,7 +12925,7 @@
                 <a:ea typeface="Calibri" pitchFamily="34" charset="-122"/>
                 <a:cs typeface="Calibri" pitchFamily="34" charset="-120"/>
               </a:rPr>
-              <a:t>1. THE FOUR SECTORS</a:t>
+              <a:t>KEY CONCEPTS</a:t>
             </a:r>
             <a:endParaRPr lang="en-US" sz="1400" dirty="0"/>
           </a:p>
@@ -13332,7 +13243,7 @@
               <a:buNone/>
             </a:pPr>
             <a:r>
-              <a:rPr lang="en-US" sz="4000" b="1" dirty="0">
+              <a:rPr lang="en-US" sz="3200" b="1" dirty="0">
                 <a:solidFill>
                   <a:srgbClr val="111111"/>
                 </a:solidFill>
@@ -13342,7 +13253,7 @@
               </a:rPr>
               <a:t>Topic: Economic Activities</a:t>
             </a:r>
-            <a:endParaRPr lang="en-US" sz="4000" dirty="0"/>
+            <a:endParaRPr lang="en-US" sz="3200" dirty="0"/>
           </a:p>
           <a:p>
             <a:pPr algn="l" indent="0" marL="0">
@@ -13352,7 +13263,7 @@
               <a:buNone/>
             </a:pPr>
             <a:r>
-              <a:rPr lang="en-US" sz="4000" b="1" dirty="0">
+              <a:rPr lang="en-US" sz="3200" b="1" dirty="0">
                 <a:solidFill>
                   <a:srgbClr val="111111"/>
                 </a:solidFill>
@@ -13362,7 +13273,7 @@
               </a:rPr>
               <a:t>Sub-topic: Sectors of the Economy</a:t>
             </a:r>
-            <a:endParaRPr lang="en-US" sz="4000" dirty="0"/>
+            <a:endParaRPr lang="en-US" sz="3200" dirty="0"/>
           </a:p>
           <a:p>
             <a:pPr algn="l" indent="0" marL="0">
@@ -13372,7 +13283,7 @@
               <a:buNone/>
             </a:pPr>
             <a:r>
-              <a:rPr lang="en-US" sz="4000" b="1" dirty="0">
+              <a:rPr lang="en-US" sz="3200" b="1" dirty="0">
                 <a:solidFill>
                   <a:srgbClr val="990011"/>
                 </a:solidFill>
@@ -13382,7 +13293,7 @@
               </a:rPr>
               <a:t>Lesson 5 (Part 1): The Sectors of the Economy: Introduction, Definitions and Key Concepts</a:t>
             </a:r>
-            <a:endParaRPr lang="en-US" sz="4000" dirty="0"/>
+            <a:endParaRPr lang="en-US" sz="3200" dirty="0"/>
           </a:p>
         </p:txBody>
       </p:sp>
@@ -13515,7 +13426,7 @@
         <p:spPr>
           <a:xfrm>
             <a:off x="0" y="658368"/>
-            <a:ext cx="3840480" cy="5833872"/>
+            <a:ext cx="5120640" cy="5833872"/>
           </a:xfrm>
           <a:prstGeom prst="rect">
             <a:avLst/>
@@ -13530,8 +13441,8 @@
         </p:nvSpPr>
         <p:spPr>
           <a:xfrm>
-            <a:off x="4069080" y="1005840"/>
-            <a:ext cx="7802575" cy="731520"/>
+            <a:off x="5349240" y="1005840"/>
+            <a:ext cx="6522415" cy="731520"/>
           </a:xfrm>
           <a:prstGeom prst="rect">
             <a:avLst/>
@@ -13571,8 +13482,8 @@
         </p:nvSpPr>
         <p:spPr>
           <a:xfrm>
-            <a:off x="4069080" y="1783080"/>
-            <a:ext cx="7802575" cy="4663440"/>
+            <a:off x="5349240" y="1783080"/>
+            <a:ext cx="6522415" cy="4663440"/>
           </a:xfrm>
           <a:prstGeom prst="rect">
             <a:avLst/>
@@ -13604,11 +13515,12 @@
             <a:endParaRPr lang="en-US" sz="4000" dirty="0"/>
           </a:p>
           <a:p>
-            <a:pPr algn="l" indent="0" marL="0">
+            <a:pPr algn="l" marL="342900" indent="-342900">
               <a:spcAft>
                 <a:spcPts val="800"/>
               </a:spcAft>
-              <a:buNone/>
+              <a:buSzPct val="100000"/>
+              <a:buChar char="•"/>
             </a:pPr>
             <a:r>
               <a:rPr lang="en-US" sz="4000" b="1" dirty="0">
@@ -13621,11 +13533,12 @@
               </a:rPr>
               <a:t>Economy: </a:t>
             </a:r>
-            <a:pPr algn="l" indent="0" marL="0">
+            <a:pPr algn="l" marL="342900" indent="-342900">
               <a:spcAft>
                 <a:spcPts val="800"/>
               </a:spcAft>
-              <a:buNone/>
+              <a:buSzPct val="100000"/>
+              <a:buChar char="•"/>
             </a:pPr>
             <a:r>
               <a:rPr lang="en-US" sz="4000" dirty="0">
@@ -13636,16 +13549,17 @@
                 <a:ea typeface="Times New Roman" pitchFamily="34" charset="-122"/>
                 <a:cs typeface="Times New Roman" pitchFamily="34" charset="-120"/>
               </a:rPr>
-              <a:t>It is all the work people do to produce, sell and buy goods and services.</a:t>
+              <a:t>It is the production, exchange and use of goods and services.</a:t>
             </a:r>
             <a:endParaRPr lang="en-US" sz="4000" dirty="0"/>
           </a:p>
           <a:p>
-            <a:pPr algn="l" indent="0" marL="0">
+            <a:pPr algn="l" marL="342900" indent="-342900">
               <a:spcAft>
                 <a:spcPts val="800"/>
               </a:spcAft>
-              <a:buNone/>
+              <a:buSzPct val="100000"/>
+              <a:buChar char="•"/>
             </a:pPr>
             <a:r>
               <a:rPr lang="en-US" sz="4000" b="1" dirty="0">
@@ -13656,13 +13570,14 @@
                 <a:ea typeface="Times New Roman" pitchFamily="34" charset="-122"/>
                 <a:cs typeface="Times New Roman" pitchFamily="34" charset="-120"/>
               </a:rPr>
-              <a:t>Goods: </a:t>
-            </a:r>
-            <a:pPr algn="l" indent="0" marL="0">
+              <a:t>Economic activity: </a:t>
+            </a:r>
+            <a:pPr algn="l" marL="342900" indent="-342900">
               <a:spcAft>
                 <a:spcPts val="800"/>
               </a:spcAft>
-              <a:buNone/>
+              <a:buSzPct val="100000"/>
+              <a:buChar char="•"/>
             </a:pPr>
             <a:r>
               <a:rPr lang="en-US" sz="4000" dirty="0">
@@ -13673,7 +13588,7 @@
                 <a:ea typeface="Times New Roman" pitchFamily="34" charset="-122"/>
                 <a:cs typeface="Times New Roman" pitchFamily="34" charset="-120"/>
               </a:rPr>
-              <a:t>They are things we can touch, such as food and clothes.</a:t>
+              <a:t>It is work done to earn money.</a:t>
             </a:r>
             <a:endParaRPr lang="en-US" sz="4000" dirty="0"/>
           </a:p>
@@ -13877,11 +13792,51 @@
           <a:bodyPr wrap="square" lIns="0" tIns="0" rIns="0" bIns="0" rtlCol="0" anchor="t"/>
           <a:lstStyle/>
           <a:p>
-            <a:pPr algn="l" indent="0" marL="0">
+            <a:pPr algn="l" marL="342900" indent="-342900">
               <a:spcAft>
                 <a:spcPts val="800"/>
               </a:spcAft>
-              <a:buNone/>
+              <a:buSzPct val="100000"/>
+              <a:buChar char="•"/>
+            </a:pPr>
+            <a:r>
+              <a:rPr lang="en-US" sz="4000" b="1" dirty="0">
+                <a:solidFill>
+                  <a:srgbClr val="111111"/>
+                </a:solidFill>
+                <a:latin typeface="Times New Roman" pitchFamily="34" charset="0"/>
+                <a:ea typeface="Times New Roman" pitchFamily="34" charset="-122"/>
+                <a:cs typeface="Times New Roman" pitchFamily="34" charset="-120"/>
+              </a:rPr>
+              <a:t>Goods: </a:t>
+            </a:r>
+            <a:pPr algn="l" marL="342900" indent="-342900">
+              <a:spcAft>
+                <a:spcPts val="800"/>
+              </a:spcAft>
+              <a:buSzPct val="100000"/>
+              <a:buChar char="•"/>
+            </a:pPr>
+            <a:r>
+              <a:rPr lang="en-US" sz="4000" dirty="0">
+                <a:solidFill>
+                  <a:srgbClr val="111111"/>
+                </a:solidFill>
+                <a:latin typeface="Times New Roman" pitchFamily="34" charset="0"/>
+                <a:ea typeface="Times New Roman" pitchFamily="34" charset="-122"/>
+                <a:cs typeface="Times New Roman" pitchFamily="34" charset="-120"/>
+              </a:rPr>
+              <a:t>They are things we can touch, like cloth and maize.</a:t>
+            </a:r>
+            <a:endParaRPr lang="en-US" sz="4000" dirty="0"/>
+          </a:p>
+          <a:p>
+            <a:pPr algn="l" marL="342900" indent="-342900">
+              <a:spcAft>
+                <a:spcPts val="800"/>
+              </a:spcAft>
+              <a:buSzPct val="100000"/>
+              <a:buChar char="•"/>
             </a:pPr>
             <a:r>
               <a:rPr lang="en-US" sz="4000" b="1" dirty="0">
@@ -13894,11 +13849,12 @@
               </a:rPr>
               <a:t>Services: </a:t>
             </a:r>
-            <a:pPr algn="l" indent="0" marL="0">
+            <a:pPr algn="l" marL="342900" indent="-342900">
               <a:spcAft>
                 <a:spcPts val="800"/>
               </a:spcAft>
-              <a:buNone/>
+              <a:buSzPct val="100000"/>
+              <a:buChar char="•"/>
             </a:pPr>
             <a:r>
               <a:rPr lang="en-US" sz="4000" dirty="0">
@@ -13909,16 +13865,17 @@
                 <a:ea typeface="Times New Roman" pitchFamily="34" charset="-122"/>
                 <a:cs typeface="Times New Roman" pitchFamily="34" charset="-120"/>
               </a:rPr>
-              <a:t>They are work done for other people, such as teaching and transport.</a:t>
+              <a:t>They are work done for other people, like teaching and transport.</a:t>
             </a:r>
             <a:endParaRPr lang="en-US" sz="4000" dirty="0"/>
           </a:p>
           <a:p>
-            <a:pPr algn="l" indent="0" marL="0">
+            <a:pPr algn="l" marL="342900" indent="-342900">
               <a:spcAft>
                 <a:spcPts val="800"/>
               </a:spcAft>
-              <a:buNone/>
+              <a:buSzPct val="100000"/>
+              <a:buChar char="•"/>
             </a:pPr>
             <a:r>
               <a:rPr lang="en-US" sz="4000" b="1" dirty="0">
@@ -13929,13 +13886,14 @@
                 <a:ea typeface="Times New Roman" pitchFamily="34" charset="-122"/>
                 <a:cs typeface="Times New Roman" pitchFamily="34" charset="-120"/>
               </a:rPr>
-              <a:t>Raw material: </a:t>
-            </a:r>
-            <a:pPr algn="l" indent="0" marL="0">
+              <a:t>Sector of the economy: </a:t>
+            </a:r>
+            <a:pPr algn="l" marL="342900" indent="-342900">
               <a:spcAft>
                 <a:spcPts val="800"/>
               </a:spcAft>
-              <a:buNone/>
+              <a:buSzPct val="100000"/>
+              <a:buChar char="•"/>
             </a:pPr>
             <a:r>
               <a:rPr lang="en-US" sz="4000" dirty="0">
@@ -13946,44 +13904,7 @@
                 <a:ea typeface="Times New Roman" pitchFamily="34" charset="-122"/>
                 <a:cs typeface="Times New Roman" pitchFamily="34" charset="-120"/>
               </a:rPr>
-              <a:t>It is a natural product used to make goods, such as cotton.</a:t>
-            </a:r>
-            <a:endParaRPr lang="en-US" sz="4000" dirty="0"/>
-          </a:p>
-          <a:p>
-            <a:pPr algn="l" indent="0" marL="0">
-              <a:spcAft>
-                <a:spcPts val="800"/>
-              </a:spcAft>
-              <a:buNone/>
-            </a:pPr>
-            <a:r>
-              <a:rPr lang="en-US" sz="4000" b="1" dirty="0">
-                <a:solidFill>
-                  <a:srgbClr val="111111"/>
-                </a:solidFill>
-                <a:latin typeface="Times New Roman" pitchFamily="34" charset="0"/>
-                <a:ea typeface="Times New Roman" pitchFamily="34" charset="-122"/>
-                <a:cs typeface="Times New Roman" pitchFamily="34" charset="-120"/>
-              </a:rPr>
-              <a:t>Sector: </a:t>
-            </a:r>
-            <a:pPr algn="l" indent="0" marL="0">
-              <a:spcAft>
-                <a:spcPts val="800"/>
-              </a:spcAft>
-              <a:buNone/>
-            </a:pPr>
-            <a:r>
-              <a:rPr lang="en-US" sz="4000" dirty="0">
-                <a:solidFill>
-                  <a:srgbClr val="111111"/>
-                </a:solidFill>
-                <a:latin typeface="Times New Roman" pitchFamily="34" charset="0"/>
-                <a:ea typeface="Times New Roman" pitchFamily="34" charset="-122"/>
-                <a:cs typeface="Times New Roman" pitchFamily="34" charset="-120"/>
-              </a:rPr>
-              <a:t>It is a group of jobs of the same kind.</a:t>
+              <a:t>It is a group of similar economic activities.</a:t>
             </a:r>
             <a:endParaRPr lang="en-US" sz="4000" dirty="0"/>
           </a:p>
@@ -14101,9 +14022,131 @@
           </a:p>
         </p:txBody>
       </p:sp>
+      <p:sp>
+        <p:nvSpPr>
+          <p:cNvPr id="3" name="Text 1"/>
+          <p:cNvSpPr/>
+          <p:nvPr/>
+        </p:nvSpPr>
+        <p:spPr>
+          <a:xfrm>
+            <a:off x="365760" y="1005840"/>
+            <a:ext cx="11460175" cy="731520"/>
+          </a:xfrm>
+          <a:prstGeom prst="rect">
+            <a:avLst/>
+          </a:prstGeom>
+          <a:noFill/>
+          <a:ln/>
+        </p:spPr>
+        <p:txBody>
+          <a:bodyPr wrap="square" lIns="0" tIns="0" rIns="0" bIns="0" rtlCol="0" anchor="ctr">
+            <a:normAutofit/>
+          </a:bodyPr>
+          <a:lstStyle/>
+          <a:p>
+            <a:pPr algn="ctr" indent="0" marL="0">
+              <a:buNone/>
+            </a:pPr>
+            <a:r>
+              <a:rPr lang="en-US" sz="3600" b="1" dirty="0">
+                <a:solidFill>
+                  <a:srgbClr val="990011"/>
+                </a:solidFill>
+                <a:latin typeface="Times New Roman" pitchFamily="34" charset="0"/>
+                <a:ea typeface="Times New Roman" pitchFamily="34" charset="-122"/>
+                <a:cs typeface="Times New Roman" pitchFamily="34" charset="-120"/>
+              </a:rPr>
+              <a:t>Key Concepts: The Four Sectors</a:t>
+            </a:r>
+            <a:endParaRPr lang="en-US" sz="3600" dirty="0"/>
+          </a:p>
+        </p:txBody>
+      </p:sp>
+      <p:sp>
+        <p:nvSpPr>
+          <p:cNvPr id="4" name="Text 2"/>
+          <p:cNvSpPr/>
+          <p:nvPr/>
+        </p:nvSpPr>
+        <p:spPr>
+          <a:xfrm>
+            <a:off x="365760" y="1783080"/>
+            <a:ext cx="4846320" cy="4617720"/>
+          </a:xfrm>
+          <a:prstGeom prst="rect">
+            <a:avLst/>
+          </a:prstGeom>
+          <a:noFill/>
+          <a:ln/>
+        </p:spPr>
+        <p:txBody>
+          <a:bodyPr wrap="square" lIns="0" tIns="0" rIns="0" bIns="0" rtlCol="0" anchor="t"/>
+          <a:lstStyle/>
+          <a:p>
+            <a:pPr algn="l" indent="0" marL="0">
+              <a:spcAft>
+                <a:spcPts val="800"/>
+              </a:spcAft>
+              <a:buNone/>
+            </a:pPr>
+            <a:r>
+              <a:rPr lang="en-US" sz="3600" i="1" dirty="0">
+                <a:solidFill>
+                  <a:srgbClr val="111111"/>
+                </a:solidFill>
+                <a:latin typeface="Times New Roman" pitchFamily="34" charset="0"/>
+                <a:ea typeface="Times New Roman" pitchFamily="34" charset="-122"/>
+                <a:cs typeface="Times New Roman" pitchFamily="34" charset="-120"/>
+              </a:rPr>
+              <a:t>Economic activities are grouped into four sectors:</a:t>
+            </a:r>
+            <a:endParaRPr lang="en-US" sz="3600" dirty="0"/>
+          </a:p>
+          <a:p>
+            <a:pPr algn="l" marL="342900" indent="-342900">
+              <a:spcAft>
+                <a:spcPts val="800"/>
+              </a:spcAft>
+              <a:buSzPct val="100000"/>
+              <a:buChar char="•"/>
+            </a:pPr>
+            <a:r>
+              <a:rPr lang="en-US" sz="3600" b="1" dirty="0">
+                <a:solidFill>
+                  <a:srgbClr val="111111"/>
+                </a:solidFill>
+                <a:latin typeface="Times New Roman" pitchFamily="34" charset="0"/>
+                <a:ea typeface="Times New Roman" pitchFamily="34" charset="-122"/>
+                <a:cs typeface="Times New Roman" pitchFamily="34" charset="-120"/>
+              </a:rPr>
+              <a:t>Primary sector: </a:t>
+            </a:r>
+            <a:pPr algn="l" marL="342900" indent="-342900">
+              <a:spcAft>
+                <a:spcPts val="800"/>
+              </a:spcAft>
+              <a:buSzPct val="100000"/>
+              <a:buChar char="•"/>
+            </a:pPr>
+            <a:r>
+              <a:rPr lang="en-US" sz="3600" dirty="0">
+                <a:solidFill>
+                  <a:srgbClr val="111111"/>
+                </a:solidFill>
+                <a:latin typeface="Times New Roman" pitchFamily="34" charset="0"/>
+                <a:ea typeface="Times New Roman" pitchFamily="34" charset="-122"/>
+                <a:cs typeface="Times New Roman" pitchFamily="34" charset="-120"/>
+              </a:rPr>
+              <a:t>Taking resources from nature, like farming (cotton).</a:t>
+            </a:r>
+            <a:endParaRPr lang="en-US" sz="3600" dirty="0"/>
+          </a:p>
+        </p:txBody>
+      </p:sp>
       <p:pic>
         <p:nvPicPr>
-          <p:cNvPr id="3" name="Image 0" descr="/home/claude/f4/img/minesec_sheet.png">    </p:cNvPr>
+          <p:cNvPr id="5" name="Image 0" descr="/home/claude/f4/img/v2/cotton_journey_last.png">    </p:cNvPr>
           <p:cNvPicPr>
             <a:picLocks noChangeAspect="1"/>
           </p:cNvPicPr>
@@ -14117,8 +14160,8 @@
         </p:blipFill>
         <p:spPr>
           <a:xfrm>
-            <a:off x="0" y="658368"/>
-            <a:ext cx="2468880" cy="5833872"/>
+            <a:off x="5349240" y="2617506"/>
+            <a:ext cx="6659575" cy="2601397"/>
           </a:xfrm>
           <a:prstGeom prst="rect">
             <a:avLst/>
@@ -14127,14 +14170,14 @@
       </p:pic>
       <p:sp>
         <p:nvSpPr>
-          <p:cNvPr id="4" name="Text 1"/>
+          <p:cNvPr id="6" name="Text 3"/>
           <p:cNvSpPr/>
           <p:nvPr/>
         </p:nvSpPr>
         <p:spPr>
           <a:xfrm>
-            <a:off x="2697480" y="1005840"/>
-            <a:ext cx="9174175" cy="731520"/>
+            <a:off x="5349240" y="6089904"/>
+            <a:ext cx="6659575" cy="347472"/>
           </a:xfrm>
           <a:prstGeom prst="rect">
             <a:avLst/>
@@ -14143,142 +14186,24 @@
           <a:ln/>
         </p:spPr>
         <p:txBody>
-          <a:bodyPr wrap="square" lIns="0" tIns="0" rIns="0" bIns="0" rtlCol="0" anchor="ctr">
-            <a:normAutofit/>
-          </a:bodyPr>
+          <a:bodyPr wrap="square" lIns="0" tIns="0" rIns="0" bIns="0" rtlCol="0" anchor="ctr"/>
           <a:lstStyle/>
           <a:p>
             <a:pPr algn="ctr" indent="0" marL="0">
               <a:buNone/>
             </a:pPr>
             <a:r>
-              <a:rPr lang="en-US" sz="3600" b="1" dirty="0">
-                <a:solidFill>
-                  <a:srgbClr val="990011"/>
+              <a:rPr lang="en-US" sz="1600" i="1" dirty="0">
+                <a:solidFill>
+                  <a:srgbClr val="555555"/>
                 </a:solidFill>
                 <a:latin typeface="Times New Roman" pitchFamily="34" charset="0"/>
                 <a:ea typeface="Times New Roman" pitchFamily="34" charset="-122"/>
                 <a:cs typeface="Times New Roman" pitchFamily="34" charset="-120"/>
               </a:rPr>
-              <a:t>1. The Four Sectors of the Economy</a:t>
-            </a:r>
-            <a:endParaRPr lang="en-US" sz="3600" dirty="0"/>
-          </a:p>
-        </p:txBody>
-      </p:sp>
-      <p:sp>
-        <p:nvSpPr>
-          <p:cNvPr id="5" name="Text 2"/>
-          <p:cNvSpPr/>
-          <p:nvPr/>
-        </p:nvSpPr>
-        <p:spPr>
-          <a:xfrm>
-            <a:off x="2697480" y="1783080"/>
-            <a:ext cx="9174175" cy="4663440"/>
-          </a:xfrm>
-          <a:prstGeom prst="rect">
-            <a:avLst/>
-          </a:prstGeom>
-          <a:noFill/>
-          <a:ln/>
-        </p:spPr>
-        <p:txBody>
-          <a:bodyPr wrap="square" lIns="0" tIns="0" rIns="0" bIns="0" rtlCol="0" anchor="t"/>
-          <a:lstStyle/>
-          <a:p>
-            <a:pPr algn="l" indent="0" marL="0">
-              <a:spcAft>
-                <a:spcPts val="800"/>
-              </a:spcAft>
-              <a:buNone/>
-            </a:pPr>
-            <a:r>
-              <a:rPr lang="en-US" sz="4000" i="1" dirty="0">
-                <a:solidFill>
-                  <a:srgbClr val="111111"/>
-                </a:solidFill>
-                <a:latin typeface="Times New Roman" pitchFamily="34" charset="0"/>
-                <a:ea typeface="Times New Roman" pitchFamily="34" charset="-122"/>
-                <a:cs typeface="Times New Roman" pitchFamily="34" charset="-120"/>
-              </a:rPr>
-              <a:t>The economy is divided into four sectors:</a:t>
-            </a:r>
-            <a:endParaRPr lang="en-US" sz="4000" dirty="0"/>
-          </a:p>
-          <a:p>
-            <a:pPr algn="l" indent="0" marL="0">
-              <a:spcAft>
-                <a:spcPts val="800"/>
-              </a:spcAft>
-              <a:buNone/>
-            </a:pPr>
-            <a:r>
-              <a:rPr lang="en-US" sz="4000" b="1" dirty="0">
-                <a:solidFill>
-                  <a:srgbClr val="111111"/>
-                </a:solidFill>
-                <a:latin typeface="Times New Roman" pitchFamily="34" charset="0"/>
-                <a:ea typeface="Times New Roman" pitchFamily="34" charset="-122"/>
-                <a:cs typeface="Times New Roman" pitchFamily="34" charset="-120"/>
-              </a:rPr>
-              <a:t>Primary sector: </a:t>
-            </a:r>
-            <a:pPr algn="l" indent="0" marL="0">
-              <a:spcAft>
-                <a:spcPts val="800"/>
-              </a:spcAft>
-              <a:buNone/>
-            </a:pPr>
-            <a:r>
-              <a:rPr lang="en-US" sz="4000" dirty="0">
-                <a:solidFill>
-                  <a:srgbClr val="111111"/>
-                </a:solidFill>
-                <a:latin typeface="Times New Roman" pitchFamily="34" charset="0"/>
-                <a:ea typeface="Times New Roman" pitchFamily="34" charset="-122"/>
-                <a:cs typeface="Times New Roman" pitchFamily="34" charset="-120"/>
-              </a:rPr>
-              <a:t>It takes products from nature, such as cotton from the farm.</a:t>
-            </a:r>
-            <a:endParaRPr lang="en-US" sz="4000" dirty="0"/>
-          </a:p>
-          <a:p>
-            <a:pPr algn="l" indent="0" marL="0">
-              <a:spcAft>
-                <a:spcPts val="800"/>
-              </a:spcAft>
-              <a:buNone/>
-            </a:pPr>
-            <a:r>
-              <a:rPr lang="en-US" sz="4000" b="1" dirty="0">
-                <a:solidFill>
-                  <a:srgbClr val="111111"/>
-                </a:solidFill>
-                <a:latin typeface="Times New Roman" pitchFamily="34" charset="0"/>
-                <a:ea typeface="Times New Roman" pitchFamily="34" charset="-122"/>
-                <a:cs typeface="Times New Roman" pitchFamily="34" charset="-120"/>
-              </a:rPr>
-              <a:t>Secondary sector: </a:t>
-            </a:r>
-            <a:pPr algn="l" indent="0" marL="0">
-              <a:spcAft>
-                <a:spcPts val="800"/>
-              </a:spcAft>
-              <a:buNone/>
-            </a:pPr>
-            <a:r>
-              <a:rPr lang="en-US" sz="4000" dirty="0">
-                <a:solidFill>
-                  <a:srgbClr val="111111"/>
-                </a:solidFill>
-                <a:latin typeface="Times New Roman" pitchFamily="34" charset="0"/>
-                <a:ea typeface="Times New Roman" pitchFamily="34" charset="-122"/>
-                <a:cs typeface="Times New Roman" pitchFamily="34" charset="-120"/>
-              </a:rPr>
-              <a:t>It turns raw materials into goods, such as cloth made from cotton.</a:t>
-            </a:r>
-            <a:endParaRPr lang="en-US" sz="4000" dirty="0"/>
+              <a:t>Illustration: the journey of cotton</a:t>
+            </a:r>
+            <a:endParaRPr lang="en-US" sz="1600" dirty="0"/>
           </a:p>
         </p:txBody>
       </p:sp>
@@ -14453,7 +14378,7 @@
                 <a:ea typeface="Times New Roman" pitchFamily="34" charset="-122"/>
                 <a:cs typeface="Times New Roman" pitchFamily="34" charset="-120"/>
               </a:rPr>
-              <a:t>1. The Four Sectors of the Economy (continued)</a:t>
+              <a:t>Key Concepts: The Four Sectors</a:t>
             </a:r>
             <a:endParaRPr lang="en-US" sz="3600" dirty="0"/>
           </a:p>
@@ -14480,11 +14405,51 @@
           <a:bodyPr wrap="square" lIns="0" tIns="0" rIns="0" bIns="0" rtlCol="0" anchor="t"/>
           <a:lstStyle/>
           <a:p>
-            <a:pPr algn="l" indent="0" marL="0">
+            <a:pPr algn="l" marL="342900" indent="-342900">
               <a:spcAft>
                 <a:spcPts val="800"/>
               </a:spcAft>
-              <a:buNone/>
+              <a:buSzPct val="100000"/>
+              <a:buChar char="•"/>
+            </a:pPr>
+            <a:r>
+              <a:rPr lang="en-US" sz="4000" b="1" dirty="0">
+                <a:solidFill>
+                  <a:srgbClr val="111111"/>
+                </a:solidFill>
+                <a:latin typeface="Times New Roman" pitchFamily="34" charset="0"/>
+                <a:ea typeface="Times New Roman" pitchFamily="34" charset="-122"/>
+                <a:cs typeface="Times New Roman" pitchFamily="34" charset="-120"/>
+              </a:rPr>
+              <a:t>Secondary sector: </a:t>
+            </a:r>
+            <a:pPr algn="l" marL="342900" indent="-342900">
+              <a:spcAft>
+                <a:spcPts val="800"/>
+              </a:spcAft>
+              <a:buSzPct val="100000"/>
+              <a:buChar char="•"/>
+            </a:pPr>
+            <a:r>
+              <a:rPr lang="en-US" sz="4000" dirty="0">
+                <a:solidFill>
+                  <a:srgbClr val="111111"/>
+                </a:solidFill>
+                <a:latin typeface="Times New Roman" pitchFamily="34" charset="0"/>
+                <a:ea typeface="Times New Roman" pitchFamily="34" charset="-122"/>
+                <a:cs typeface="Times New Roman" pitchFamily="34" charset="-120"/>
+              </a:rPr>
+              <a:t>Transforming raw materials, like making cloth at CICAM.</a:t>
+            </a:r>
+            <a:endParaRPr lang="en-US" sz="4000" dirty="0"/>
+          </a:p>
+          <a:p>
+            <a:pPr algn="l" marL="342900" indent="-342900">
+              <a:spcAft>
+                <a:spcPts val="800"/>
+              </a:spcAft>
+              <a:buSzPct val="100000"/>
+              <a:buChar char="•"/>
             </a:pPr>
             <a:r>
               <a:rPr lang="en-US" sz="4000" b="1" dirty="0">
@@ -14497,11 +14462,12 @@
               </a:rPr>
               <a:t>Tertiary sector: </a:t>
             </a:r>
-            <a:pPr algn="l" indent="0" marL="0">
+            <a:pPr algn="l" marL="342900" indent="-342900">
               <a:spcAft>
                 <a:spcPts val="800"/>
               </a:spcAft>
-              <a:buNone/>
+              <a:buSzPct val="100000"/>
+              <a:buChar char="•"/>
             </a:pPr>
             <a:r>
               <a:rPr lang="en-US" sz="4000" dirty="0">
@@ -14512,44 +14478,7 @@
                 <a:ea typeface="Times New Roman" pitchFamily="34" charset="-122"/>
                 <a:cs typeface="Times New Roman" pitchFamily="34" charset="-120"/>
               </a:rPr>
-              <a:t>It gives services, such as selling and transporting the cloth.</a:t>
-            </a:r>
-            <a:endParaRPr lang="en-US" sz="4000" dirty="0"/>
-          </a:p>
-          <a:p>
-            <a:pPr algn="l" indent="0" marL="0">
-              <a:spcAft>
-                <a:spcPts val="800"/>
-              </a:spcAft>
-              <a:buNone/>
-            </a:pPr>
-            <a:r>
-              <a:rPr lang="en-US" sz="4000" b="1" dirty="0">
-                <a:solidFill>
-                  <a:srgbClr val="111111"/>
-                </a:solidFill>
-                <a:latin typeface="Times New Roman" pitchFamily="34" charset="0"/>
-                <a:ea typeface="Times New Roman" pitchFamily="34" charset="-122"/>
-                <a:cs typeface="Times New Roman" pitchFamily="34" charset="-120"/>
-              </a:rPr>
-              <a:t>Quaternary sector: </a:t>
-            </a:r>
-            <a:pPr algn="l" indent="0" marL="0">
-              <a:spcAft>
-                <a:spcPts val="800"/>
-              </a:spcAft>
-              <a:buNone/>
-            </a:pPr>
-            <a:r>
-              <a:rPr lang="en-US" sz="4000" dirty="0">
-                <a:solidFill>
-                  <a:srgbClr val="111111"/>
-                </a:solidFill>
-                <a:latin typeface="Times New Roman" pitchFamily="34" charset="0"/>
-                <a:ea typeface="Times New Roman" pitchFamily="34" charset="-122"/>
-                <a:cs typeface="Times New Roman" pitchFamily="34" charset="-120"/>
-              </a:rPr>
-              <a:t>It creates knowledge, such as research on better cotton seeds.</a:t>
+              <a:t>Giving services, like selling cloth in the market.</a:t>
             </a:r>
             <a:endParaRPr lang="en-US" sz="4000" dirty="0"/>
           </a:p>
@@ -14675,8 +14604,8 @@
         </p:nvSpPr>
         <p:spPr>
           <a:xfrm>
-            <a:off x="457200" y="1005840"/>
-            <a:ext cx="11277295" cy="731520"/>
+            <a:off x="365760" y="1005840"/>
+            <a:ext cx="11460175" cy="731520"/>
           </a:xfrm>
           <a:prstGeom prst="rect">
             <a:avLst/>
@@ -14685,7 +14614,9 @@
           <a:ln/>
         </p:spPr>
         <p:txBody>
-          <a:bodyPr wrap="square" lIns="0" tIns="0" rIns="0" bIns="0" rtlCol="0" anchor="ctr"/>
+          <a:bodyPr wrap="square" lIns="0" tIns="0" rIns="0" bIns="0" rtlCol="0" anchor="ctr">
+            <a:normAutofit/>
+          </a:bodyPr>
           <a:lstStyle/>
           <a:p>
             <a:pPr algn="ctr" indent="0" marL="0">
@@ -14700,7 +14631,68 @@
                 <a:ea typeface="Times New Roman" pitchFamily="34" charset="-122"/>
                 <a:cs typeface="Times New Roman" pitchFamily="34" charset="-120"/>
               </a:rPr>
-              <a:t>1. The Four Sectors of the Economy</a:t>
+              <a:t>Key Concepts: The Four Sectors</a:t>
+            </a:r>
+            <a:endParaRPr lang="en-US" sz="3600" dirty="0"/>
+          </a:p>
+        </p:txBody>
+      </p:sp>
+      <p:sp>
+        <p:nvSpPr>
+          <p:cNvPr id="4" name="Text 2"/>
+          <p:cNvSpPr/>
+          <p:nvPr/>
+        </p:nvSpPr>
+        <p:spPr>
+          <a:xfrm>
+            <a:off x="365760" y="1783080"/>
+            <a:ext cx="4846320" cy="4617720"/>
+          </a:xfrm>
+          <a:prstGeom prst="rect">
+            <a:avLst/>
+          </a:prstGeom>
+          <a:noFill/>
+          <a:ln/>
+        </p:spPr>
+        <p:txBody>
+          <a:bodyPr wrap="square" lIns="0" tIns="0" rIns="0" bIns="0" rtlCol="0" anchor="t"/>
+          <a:lstStyle/>
+          <a:p>
+            <a:pPr algn="l" marL="342900" indent="-342900">
+              <a:spcAft>
+                <a:spcPts val="800"/>
+              </a:spcAft>
+              <a:buSzPct val="100000"/>
+              <a:buChar char="•"/>
+            </a:pPr>
+            <a:r>
+              <a:rPr lang="en-US" sz="3600" b="1" dirty="0">
+                <a:solidFill>
+                  <a:srgbClr val="111111"/>
+                </a:solidFill>
+                <a:latin typeface="Times New Roman" pitchFamily="34" charset="0"/>
+                <a:ea typeface="Times New Roman" pitchFamily="34" charset="-122"/>
+                <a:cs typeface="Times New Roman" pitchFamily="34" charset="-120"/>
+              </a:rPr>
+              <a:t>Quaternary sector: </a:t>
+            </a:r>
+            <a:pPr algn="l" marL="342900" indent="-342900">
+              <a:spcAft>
+                <a:spcPts val="800"/>
+              </a:spcAft>
+              <a:buSzPct val="100000"/>
+              <a:buChar char="•"/>
+            </a:pPr>
+            <a:r>
+              <a:rPr lang="en-US" sz="3600" dirty="0">
+                <a:solidFill>
+                  <a:srgbClr val="111111"/>
+                </a:solidFill>
+                <a:latin typeface="Times New Roman" pitchFamily="34" charset="0"/>
+                <a:ea typeface="Times New Roman" pitchFamily="34" charset="-122"/>
+                <a:cs typeface="Times New Roman" pitchFamily="34" charset="-120"/>
+              </a:rPr>
+              <a:t>Research and knowledge, like finding better seeds.</a:t>
             </a:r>
             <a:endParaRPr lang="en-US" sz="3600" dirty="0"/>
           </a:p>
@@ -14708,7 +14700,7 @@
       </p:sp>
       <p:pic>
         <p:nvPicPr>
-          <p:cNvPr id="4" name="Image 0" descr="/home/claude/f4/img/v2/cotton_journey_last.png">    </p:cNvPr>
+          <p:cNvPr id="5" name="Image 0" descr="/home/claude/f4/img/v2/f2t_researcher.jpg">    </p:cNvPr>
           <p:cNvPicPr>
             <a:picLocks noChangeAspect="1"/>
           </p:cNvPicPr>
@@ -14722,8 +14714,8 @@
         </p:blipFill>
         <p:spPr>
           <a:xfrm>
-            <a:off x="629930" y="1783080"/>
-            <a:ext cx="10931835" cy="4270248"/>
+            <a:off x="5349240" y="2071212"/>
+            <a:ext cx="6659575" cy="3693983"/>
           </a:xfrm>
           <a:prstGeom prst="rect">
             <a:avLst/>
@@ -14732,14 +14724,14 @@
       </p:pic>
       <p:sp>
         <p:nvSpPr>
-          <p:cNvPr id="5" name="Text 2"/>
+          <p:cNvPr id="6" name="Text 3"/>
           <p:cNvSpPr/>
           <p:nvPr/>
         </p:nvSpPr>
         <p:spPr>
           <a:xfrm>
-            <a:off x="457200" y="6089904"/>
-            <a:ext cx="11277295" cy="347472"/>
+            <a:off x="5349240" y="6089904"/>
+            <a:ext cx="6659575" cy="347472"/>
           </a:xfrm>
           <a:prstGeom prst="rect">
             <a:avLst/>
@@ -14755,7 +14747,7 @@
               <a:buNone/>
             </a:pPr>
             <a:r>
-              <a:rPr lang="en-US" sz="1800" i="1" dirty="0">
+              <a:rPr lang="en-US" sz="1600" i="1" dirty="0">
                 <a:solidFill>
                   <a:srgbClr val="555555"/>
                 </a:solidFill>
@@ -14763,9 +14755,9 @@
                 <a:ea typeface="Times New Roman" pitchFamily="34" charset="-122"/>
                 <a:cs typeface="Times New Roman" pitchFamily="34" charset="-120"/>
               </a:rPr>
-              <a:t>Illustration: the journey of cotton through the sectors</a:t>
-            </a:r>
-            <a:endParaRPr lang="en-US" sz="1800" dirty="0"/>
+              <a:t>Illustration: a researcher</a:t>
+            </a:r>
+            <a:endParaRPr lang="en-US" sz="1600" dirty="0"/>
           </a:p>
         </p:txBody>
       </p:sp>
@@ -19046,7 +19038,7 @@
                           <a:ea typeface="Calibri" pitchFamily="34" charset="-122"/>
                           <a:cs typeface="Calibri" pitchFamily="34" charset="-120"/>
                         </a:rPr>
-                        <a:t>DEFINITIONS; The Four Sectors of the Economy.</a:t>
+                        <a:t>DEFINITIONS; Key Concepts: The Four Sectors.</a:t>
                       </a:r>
                       <a:endParaRPr lang="en-US" sz="1600" dirty="0">
                         <a:latin typeface="Calibri" charset="0"/>
@@ -20002,7 +19994,7 @@
         <p:spPr>
           <a:xfrm>
             <a:off x="0" y="658368"/>
-            <a:ext cx="1463040" cy="5833872"/>
+            <a:ext cx="2468880" cy="5833872"/>
           </a:xfrm>
           <a:prstGeom prst="rect">
             <a:avLst/>
@@ -20017,8 +20009,8 @@
         </p:nvSpPr>
         <p:spPr>
           <a:xfrm>
-            <a:off x="1691640" y="1005840"/>
-            <a:ext cx="10180015" cy="731520"/>
+            <a:off x="2697480" y="1005840"/>
+            <a:ext cx="9174175" cy="731520"/>
           </a:xfrm>
           <a:prstGeom prst="rect">
             <a:avLst/>
@@ -20058,8 +20050,8 @@
         </p:nvSpPr>
         <p:spPr>
           <a:xfrm>
-            <a:off x="1691640" y="1783080"/>
-            <a:ext cx="10180015" cy="4663440"/>
+            <a:off x="2697480" y="1783080"/>
+            <a:ext cx="9174175" cy="4663440"/>
           </a:xfrm>
           <a:prstGeom prst="rect">
             <a:avLst/>
@@ -20150,7 +20142,7 @@
                 <a:ea typeface="Calibri" pitchFamily="34" charset="-122"/>
                 <a:cs typeface="Calibri" pitchFamily="34" charset="-120"/>
               </a:rPr>
-              <a:t>Without the projector (Activity 1): show a piece of cloth or a pen: things we can touch are goods.</a:t>
+              <a:t>Without the projector (Activity 1): show a piece of cloth.</a:t>
             </a:r>
             <a:endParaRPr lang="en-US" sz="2000" dirty="0"/>
           </a:p>
@@ -20171,7 +20163,7 @@
                 <a:ea typeface="Calibri" pitchFamily="34" charset="-122"/>
                 <a:cs typeface="Calibri" pitchFamily="34" charset="-120"/>
               </a:rPr>
-              <a:t>Without the projector (Activity 2): ask learners to name people who give services in Garoua.</a:t>
+              <a:t>Without the projector (Activity 2): name services in the town.</a:t>
             </a:r>
             <a:endParaRPr lang="en-US" sz="2000" dirty="0"/>
           </a:p>
@@ -20192,7 +20184,7 @@
                 <a:ea typeface="Calibri" pitchFamily="34" charset="-122"/>
                 <a:cs typeface="Calibri" pitchFamily="34" charset="-120"/>
               </a:rPr>
-              <a:t>Without the projector (Activity 3): bring raw cotton and a piece of cloth.</a:t>
+              <a:t>Without the projector (Activity 3): show raw cotton.</a:t>
             </a:r>
             <a:endParaRPr lang="en-US" sz="2000" dirty="0"/>
           </a:p>
@@ -20213,7 +20205,28 @@
                 <a:ea typeface="Calibri" pitchFamily="34" charset="-122"/>
                 <a:cs typeface="Calibri" pitchFamily="34" charset="-120"/>
               </a:rPr>
-              <a:t>Without the projector (Activity 4): draw four boxes on the board: farmer, factory, trader, researcher.</a:t>
+              <a:t>Without the projector (Activity 4): draw four boxes.</a:t>
+            </a:r>
+            <a:endParaRPr lang="en-US" sz="2000" dirty="0"/>
+          </a:p>
+          <a:p>
+            <a:pPr algn="l" marL="342900" indent="-342900">
+              <a:spcAft>
+                <a:spcPts val="800"/>
+              </a:spcAft>
+              <a:buSzPct val="100000"/>
+              <a:buChar char="•"/>
+            </a:pPr>
+            <a:r>
+              <a:rPr lang="en-US" sz="2000" dirty="0">
+                <a:solidFill>
+                  <a:srgbClr val="111111"/>
+                </a:solidFill>
+                <a:latin typeface="Calibri" pitchFamily="34" charset="0"/>
+                <a:ea typeface="Calibri" pitchFamily="34" charset="-122"/>
+                <a:cs typeface="Calibri" pitchFamily="34" charset="-120"/>
+              </a:rPr>
+              <a:t>Without the projector (Activity 5): name IRAD.</a:t>
             </a:r>
             <a:endParaRPr lang="en-US" sz="2000" dirty="0"/>
           </a:p>
@@ -20325,7 +20338,7 @@
                 <a:ea typeface="Calibri" pitchFamily="34" charset="-122"/>
                 <a:cs typeface="Calibri" pitchFamily="34" charset="-120"/>
               </a:rPr>
-              <a:t>TEACHER'S NOTE</a:t>
+              <a:t>REFERENCES</a:t>
             </a:r>
             <a:endParaRPr lang="en-US" sz="1400" dirty="0"/>
           </a:p>
@@ -20348,7 +20361,7 @@
         <p:spPr>
           <a:xfrm>
             <a:off x="0" y="658368"/>
-            <a:ext cx="5120640" cy="5833872"/>
+            <a:ext cx="3840480" cy="5833872"/>
           </a:xfrm>
           <a:prstGeom prst="rect">
             <a:avLst/>
@@ -20363,8 +20376,8 @@
         </p:nvSpPr>
         <p:spPr>
           <a:xfrm>
-            <a:off x="5349240" y="1005840"/>
-            <a:ext cx="6522415" cy="731520"/>
+            <a:off x="4069080" y="1005840"/>
+            <a:ext cx="7802575" cy="731520"/>
           </a:xfrm>
           <a:prstGeom prst="rect">
             <a:avLst/>
@@ -20390,7 +20403,7 @@
                 <a:ea typeface="Times New Roman" pitchFamily="34" charset="-122"/>
                 <a:cs typeface="Times New Roman" pitchFamily="34" charset="-120"/>
               </a:rPr>
-              <a:t>Teacher's Note (continued)</a:t>
+              <a:t>References</a:t>
             </a:r>
             <a:endParaRPr lang="en-US" sz="3600" dirty="0"/>
           </a:p>
@@ -20404,8 +20417,8 @@
         </p:nvSpPr>
         <p:spPr>
           <a:xfrm>
-            <a:off x="5349240" y="1783080"/>
-            <a:ext cx="6522415" cy="4663440"/>
+            <a:off x="4069080" y="1783080"/>
+            <a:ext cx="7802575" cy="4663440"/>
           </a:xfrm>
           <a:prstGeom prst="rect">
             <a:avLst/>
@@ -20425,7 +20438,7 @@
               <a:buChar char="•"/>
             </a:pPr>
             <a:r>
-              <a:rPr lang="en-US" sz="2000" dirty="0">
+              <a:rPr lang="en-US" sz="1800" dirty="0">
                 <a:solidFill>
                   <a:srgbClr val="111111"/>
                 </a:solidFill>
@@ -20433,9 +20446,114 @@
                 <a:ea typeface="Calibri" pitchFamily="34" charset="-122"/>
                 <a:cs typeface="Calibri" pitchFamily="34" charset="-120"/>
               </a:rPr>
-              <a:t>Without the projector (Activity 5): ask learners what a researcher does.</a:t>
-            </a:r>
-            <a:endParaRPr lang="en-US" sz="2000" dirty="0"/>
+              <a:t>Harmonised Progression Sheet, Economic Geography (5051), Form 2.</a:t>
+            </a:r>
+            <a:endParaRPr lang="en-US" sz="1800" dirty="0"/>
+          </a:p>
+          <a:p>
+            <a:pPr algn="l" marL="342900" indent="-342900">
+              <a:spcAft>
+                <a:spcPts val="800"/>
+              </a:spcAft>
+              <a:buSzPct val="100000"/>
+              <a:buChar char="•"/>
+            </a:pPr>
+            <a:r>
+              <a:rPr lang="en-US" sz="1800" dirty="0">
+                <a:solidFill>
+                  <a:srgbClr val="111111"/>
+                </a:solidFill>
+                <a:latin typeface="Calibri" pitchFamily="34" charset="0"/>
+                <a:ea typeface="Calibri" pitchFamily="34" charset="-122"/>
+                <a:cs typeface="Calibri" pitchFamily="34" charset="-120"/>
+              </a:rPr>
+              <a:t>Photo, Activity 1: “A tailor of Wa” by 10b travelling / Carsten ten Brink, CC BY-NC-ND 2.0, via Flickr (https://www.flickr.com/photos/77334245@N00/8154947468)</a:t>
+            </a:r>
+            <a:endParaRPr lang="en-US" sz="1800" dirty="0"/>
+          </a:p>
+          <a:p>
+            <a:pPr algn="l" marL="342900" indent="-342900">
+              <a:spcAft>
+                <a:spcPts val="800"/>
+              </a:spcAft>
+              <a:buSzPct val="100000"/>
+              <a:buChar char="•"/>
+            </a:pPr>
+            <a:r>
+              <a:rPr lang="en-US" sz="1800" dirty="0">
+                <a:solidFill>
+                  <a:srgbClr val="111111"/>
+                </a:solidFill>
+                <a:latin typeface="Calibri" pitchFamily="34" charset="0"/>
+                <a:ea typeface="Calibri" pitchFamily="34" charset="-122"/>
+                <a:cs typeface="Calibri" pitchFamily="34" charset="-120"/>
+              </a:rPr>
+              <a:t>Photo, Activity 2: “Medical Readiness and Training Exercise 15-3” by US Army Africa, CC BY 2.0, via Flickr (https://www.flickr.com/photos/36281822@N08/16958932197)</a:t>
+            </a:r>
+            <a:endParaRPr lang="en-US" sz="1800" dirty="0"/>
+          </a:p>
+          <a:p>
+            <a:pPr algn="l" marL="342900" indent="-342900">
+              <a:spcAft>
+                <a:spcPts val="800"/>
+              </a:spcAft>
+              <a:buSzPct val="100000"/>
+              <a:buChar char="•"/>
+            </a:pPr>
+            <a:r>
+              <a:rPr lang="en-US" sz="1800" dirty="0">
+                <a:solidFill>
+                  <a:srgbClr val="111111"/>
+                </a:solidFill>
+                <a:latin typeface="Calibri" pitchFamily="34" charset="0"/>
+                <a:ea typeface="Calibri" pitchFamily="34" charset="-122"/>
+                <a:cs typeface="Calibri" pitchFamily="34" charset="-120"/>
+              </a:rPr>
+              <a:t>Photo, Activity 3: “Women carrying cotton” by CIFOR, CC BY-NC-ND 2.0, via Flickr (https://www.flickr.com/photos/45423546@N07/35706852432)</a:t>
+            </a:r>
+            <a:endParaRPr lang="en-US" sz="1800" dirty="0"/>
+          </a:p>
+          <a:p>
+            <a:pPr algn="l" marL="342900" indent="-342900">
+              <a:spcAft>
+                <a:spcPts val="800"/>
+              </a:spcAft>
+              <a:buSzPct val="100000"/>
+              <a:buChar char="•"/>
+            </a:pPr>
+            <a:r>
+              <a:rPr lang="en-US" sz="1800" dirty="0">
+                <a:solidFill>
+                  <a:srgbClr val="111111"/>
+                </a:solidFill>
+                <a:latin typeface="Calibri" pitchFamily="34" charset="0"/>
+                <a:ea typeface="Calibri" pitchFamily="34" charset="-122"/>
+                <a:cs typeface="Calibri" pitchFamily="34" charset="-120"/>
+              </a:rPr>
+              <a:t>Photo, Activity 5: “USAMRUK Malaria Diagnostics and Control Center of Excellence microscop” by US Army Africa, CC BY 2.0, via Flickr (https://www.flickr.com/photos/36281822@N08/4077018383)</a:t>
+            </a:r>
+            <a:endParaRPr lang="en-US" sz="1800" dirty="0"/>
+          </a:p>
+          <a:p>
+            <a:pPr algn="l" marL="342900" indent="-342900">
+              <a:spcAft>
+                <a:spcPts val="800"/>
+              </a:spcAft>
+              <a:buSzPct val="100000"/>
+              <a:buChar char="•"/>
+            </a:pPr>
+            <a:r>
+              <a:rPr lang="en-US" sz="1800" dirty="0">
+                <a:solidFill>
+                  <a:srgbClr val="111111"/>
+                </a:solidFill>
+                <a:latin typeface="Calibri" pitchFamily="34" charset="0"/>
+                <a:ea typeface="Calibri" pitchFamily="34" charset="-122"/>
+                <a:cs typeface="Calibri" pitchFamily="34" charset="-120"/>
+              </a:rPr>
+              <a:t>Diagrams and animations: drawn for this lesson (Geography Department).</a:t>
+            </a:r>
+            <a:endParaRPr lang="en-US" sz="1800" dirty="0"/>
           </a:p>
         </p:txBody>
       </p:sp>
@@ -20482,331 +20600,6 @@
             <a:fld id="{F7021451-1387-4CA6-816F-3879F97B5CBC}" type="slidenum">
               <a:rPr b="1" lang="en-US"/>
               <a:t>51</a:t>
-            </a:fld>
-            <a:endParaRPr lang="en-US"/>
-          </a:p>
-        </p:txBody>
-      </p:sp>
-    </p:spTree>
-  </p:cSld>
-  <p:clrMapOvr>
-    <a:masterClrMapping/>
-  </p:clrMapOvr>
-</p:sld>
-</file>
-
-<file path=ppt/slides/slide52.xml><?xml version="1.0" encoding="utf-8"?>
-<p:sld xmlns:a="http://schemas.openxmlformats.org/drawingml/2006/main" xmlns:r="http://schemas.openxmlformats.org/officeDocument/2006/relationships" xmlns:p="http://schemas.openxmlformats.org/presentationml/2006/main">
-  <p:cSld name="Slide 52">
-    <p:spTree>
-      <p:nvGrpSpPr>
-        <p:cNvPr id="1" name=""/>
-        <p:cNvGrpSpPr/>
-        <p:nvPr/>
-      </p:nvGrpSpPr>
-      <p:grpSpPr>
-        <a:xfrm>
-          <a:off x="0" y="0"/>
-          <a:ext cx="0" cy="0"/>
-          <a:chOff x="0" y="0"/>
-          <a:chExt cx="0" cy="0"/>
-        </a:xfrm>
-      </p:grpSpPr>
-      <p:sp>
-        <p:nvSpPr>
-          <p:cNvPr id="2" name="Text 0"/>
-          <p:cNvSpPr/>
-          <p:nvPr/>
-        </p:nvSpPr>
-        <p:spPr>
-          <a:xfrm>
-            <a:off x="457200" y="713232"/>
-            <a:ext cx="11368735" cy="274320"/>
-          </a:xfrm>
-          <a:prstGeom prst="rect">
-            <a:avLst/>
-          </a:prstGeom>
-          <a:noFill/>
-          <a:ln/>
-        </p:spPr>
-        <p:txBody>
-          <a:bodyPr wrap="square" lIns="0" tIns="0" rIns="0" bIns="0" rtlCol="0" anchor="ctr"/>
-          <a:lstStyle/>
-          <a:p>
-            <a:pPr algn="r" indent="0" marL="0">
-              <a:buNone/>
-            </a:pPr>
-            <a:r>
-              <a:rPr lang="en-US" sz="1400" b="1" dirty="0">
-                <a:solidFill>
-                  <a:srgbClr val="1C3F6E"/>
-                </a:solidFill>
-                <a:latin typeface="Calibri" pitchFamily="34" charset="0"/>
-                <a:ea typeface="Calibri" pitchFamily="34" charset="-122"/>
-                <a:cs typeface="Calibri" pitchFamily="34" charset="-120"/>
-              </a:rPr>
-              <a:t>REFERENCES</a:t>
-            </a:r>
-            <a:endParaRPr lang="en-US" sz="1400" dirty="0"/>
-          </a:p>
-        </p:txBody>
-      </p:sp>
-      <p:pic>
-        <p:nvPicPr>
-          <p:cNvPr id="3" name="Image 0" descr="/home/claude/f4/img/minesec_sheet.png">    </p:cNvPr>
-          <p:cNvPicPr>
-            <a:picLocks noChangeAspect="1"/>
-          </p:cNvPicPr>
-          <p:nvPr/>
-        </p:nvPicPr>
-        <p:blipFill>
-          <a:blip r:embed="rId1"/>
-          <a:stretch>
-            <a:fillRect/>
-          </a:stretch>
-        </p:blipFill>
-        <p:spPr>
-          <a:xfrm>
-            <a:off x="0" y="658368"/>
-            <a:ext cx="3840480" cy="5833872"/>
-          </a:xfrm>
-          <a:prstGeom prst="rect">
-            <a:avLst/>
-          </a:prstGeom>
-        </p:spPr>
-      </p:pic>
-      <p:sp>
-        <p:nvSpPr>
-          <p:cNvPr id="4" name="Text 1"/>
-          <p:cNvSpPr/>
-          <p:nvPr/>
-        </p:nvSpPr>
-        <p:spPr>
-          <a:xfrm>
-            <a:off x="4069080" y="1005840"/>
-            <a:ext cx="7802575" cy="731520"/>
-          </a:xfrm>
-          <a:prstGeom prst="rect">
-            <a:avLst/>
-          </a:prstGeom>
-          <a:noFill/>
-          <a:ln/>
-        </p:spPr>
-        <p:txBody>
-          <a:bodyPr wrap="square" lIns="0" tIns="0" rIns="0" bIns="0" rtlCol="0" anchor="ctr">
-            <a:normAutofit/>
-          </a:bodyPr>
-          <a:lstStyle/>
-          <a:p>
-            <a:pPr algn="ctr" indent="0" marL="0">
-              <a:buNone/>
-            </a:pPr>
-            <a:r>
-              <a:rPr lang="en-US" sz="3600" b="1" dirty="0">
-                <a:solidFill>
-                  <a:srgbClr val="990011"/>
-                </a:solidFill>
-                <a:latin typeface="Times New Roman" pitchFamily="34" charset="0"/>
-                <a:ea typeface="Times New Roman" pitchFamily="34" charset="-122"/>
-                <a:cs typeface="Times New Roman" pitchFamily="34" charset="-120"/>
-              </a:rPr>
-              <a:t>References</a:t>
-            </a:r>
-            <a:endParaRPr lang="en-US" sz="3600" dirty="0"/>
-          </a:p>
-        </p:txBody>
-      </p:sp>
-      <p:sp>
-        <p:nvSpPr>
-          <p:cNvPr id="5" name="Text 2"/>
-          <p:cNvSpPr/>
-          <p:nvPr/>
-        </p:nvSpPr>
-        <p:spPr>
-          <a:xfrm>
-            <a:off x="4069080" y="1783080"/>
-            <a:ext cx="7802575" cy="4663440"/>
-          </a:xfrm>
-          <a:prstGeom prst="rect">
-            <a:avLst/>
-          </a:prstGeom>
-          <a:noFill/>
-          <a:ln/>
-        </p:spPr>
-        <p:txBody>
-          <a:bodyPr wrap="square" lIns="0" tIns="0" rIns="0" bIns="0" rtlCol="0" anchor="t"/>
-          <a:lstStyle/>
-          <a:p>
-            <a:pPr algn="l" marL="342900" indent="-342900">
-              <a:spcAft>
-                <a:spcPts val="800"/>
-              </a:spcAft>
-              <a:buSzPct val="100000"/>
-              <a:buChar char="•"/>
-            </a:pPr>
-            <a:r>
-              <a:rPr lang="en-US" sz="1800" dirty="0">
-                <a:solidFill>
-                  <a:srgbClr val="111111"/>
-                </a:solidFill>
-                <a:latin typeface="Calibri" pitchFamily="34" charset="0"/>
-                <a:ea typeface="Calibri" pitchFamily="34" charset="-122"/>
-                <a:cs typeface="Calibri" pitchFamily="34" charset="-120"/>
-              </a:rPr>
-              <a:t>Harmonised Progression Sheet, Economic Geography (5051), Form 2.</a:t>
-            </a:r>
-            <a:endParaRPr lang="en-US" sz="1800" dirty="0"/>
-          </a:p>
-          <a:p>
-            <a:pPr algn="l" marL="342900" indent="-342900">
-              <a:spcAft>
-                <a:spcPts val="800"/>
-              </a:spcAft>
-              <a:buSzPct val="100000"/>
-              <a:buChar char="•"/>
-            </a:pPr>
-            <a:r>
-              <a:rPr lang="en-US" sz="1800" dirty="0">
-                <a:solidFill>
-                  <a:srgbClr val="111111"/>
-                </a:solidFill>
-                <a:latin typeface="Calibri" pitchFamily="34" charset="0"/>
-                <a:ea typeface="Calibri" pitchFamily="34" charset="-122"/>
-                <a:cs typeface="Calibri" pitchFamily="34" charset="-120"/>
-              </a:rPr>
-              <a:t>Photo, Activity 1: “A tailor of Wa” by 10b travelling / Carsten ten Brink, CC BY-NC-ND 2.0, via Flickr (https://www.flickr.com/photos/77334245@N00/8154947468)</a:t>
-            </a:r>
-            <a:endParaRPr lang="en-US" sz="1800" dirty="0"/>
-          </a:p>
-          <a:p>
-            <a:pPr algn="l" marL="342900" indent="-342900">
-              <a:spcAft>
-                <a:spcPts val="800"/>
-              </a:spcAft>
-              <a:buSzPct val="100000"/>
-              <a:buChar char="•"/>
-            </a:pPr>
-            <a:r>
-              <a:rPr lang="en-US" sz="1800" dirty="0">
-                <a:solidFill>
-                  <a:srgbClr val="111111"/>
-                </a:solidFill>
-                <a:latin typeface="Calibri" pitchFamily="34" charset="0"/>
-                <a:ea typeface="Calibri" pitchFamily="34" charset="-122"/>
-                <a:cs typeface="Calibri" pitchFamily="34" charset="-120"/>
-              </a:rPr>
-              <a:t>Photo, Activity 2: “Medical Readiness and Training Exercise 15-3” by US Army Africa, CC BY 2.0, via Flickr (https://www.flickr.com/photos/36281822@N08/16958932197)</a:t>
-            </a:r>
-            <a:endParaRPr lang="en-US" sz="1800" dirty="0"/>
-          </a:p>
-          <a:p>
-            <a:pPr algn="l" marL="342900" indent="-342900">
-              <a:spcAft>
-                <a:spcPts val="800"/>
-              </a:spcAft>
-              <a:buSzPct val="100000"/>
-              <a:buChar char="•"/>
-            </a:pPr>
-            <a:r>
-              <a:rPr lang="en-US" sz="1800" dirty="0">
-                <a:solidFill>
-                  <a:srgbClr val="111111"/>
-                </a:solidFill>
-                <a:latin typeface="Calibri" pitchFamily="34" charset="0"/>
-                <a:ea typeface="Calibri" pitchFamily="34" charset="-122"/>
-                <a:cs typeface="Calibri" pitchFamily="34" charset="-120"/>
-              </a:rPr>
-              <a:t>Photo, Activity 3: “Women carrying cotton” by CIFOR, CC BY-NC-ND 2.0, via Flickr (https://www.flickr.com/photos/45423546@N07/35706852432)</a:t>
-            </a:r>
-            <a:endParaRPr lang="en-US" sz="1800" dirty="0"/>
-          </a:p>
-          <a:p>
-            <a:pPr algn="l" marL="342900" indent="-342900">
-              <a:spcAft>
-                <a:spcPts val="800"/>
-              </a:spcAft>
-              <a:buSzPct val="100000"/>
-              <a:buChar char="•"/>
-            </a:pPr>
-            <a:r>
-              <a:rPr lang="en-US" sz="1800" dirty="0">
-                <a:solidFill>
-                  <a:srgbClr val="111111"/>
-                </a:solidFill>
-                <a:latin typeface="Calibri" pitchFamily="34" charset="0"/>
-                <a:ea typeface="Calibri" pitchFamily="34" charset="-122"/>
-                <a:cs typeface="Calibri" pitchFamily="34" charset="-120"/>
-              </a:rPr>
-              <a:t>Photo, Activity 5: “USAMRUK Malaria Diagnostics and Control Center of Excellence microscop” by US Army Africa, CC BY 2.0, via Flickr (https://www.flickr.com/photos/36281822@N08/4077018383)</a:t>
-            </a:r>
-            <a:endParaRPr lang="en-US" sz="1800" dirty="0"/>
-          </a:p>
-          <a:p>
-            <a:pPr algn="l" marL="342900" indent="-342900">
-              <a:spcAft>
-                <a:spcPts val="800"/>
-              </a:spcAft>
-              <a:buSzPct val="100000"/>
-              <a:buChar char="•"/>
-            </a:pPr>
-            <a:r>
-              <a:rPr lang="en-US" sz="1800" dirty="0">
-                <a:solidFill>
-                  <a:srgbClr val="111111"/>
-                </a:solidFill>
-                <a:latin typeface="Calibri" pitchFamily="34" charset="0"/>
-                <a:ea typeface="Calibri" pitchFamily="34" charset="-122"/>
-                <a:cs typeface="Calibri" pitchFamily="34" charset="-120"/>
-              </a:rPr>
-              <a:t>Diagrams and animations: drawn for this lesson (Geography Department).</a:t>
-            </a:r>
-            <a:endParaRPr lang="en-US" sz="1800" dirty="0"/>
-          </a:p>
-        </p:txBody>
-      </p:sp>
-      <p:sp>
-        <p:nvSpPr>
-          <p:cNvPr id="25" name="Slide Number Placeholder 0"/>
-          <p:cNvSpPr>
-            <a:spLocks noGrp="1"/>
-          </p:cNvSpPr>
-          <p:nvPr>
-            <p:ph type="sldNum" sz="quarter" idx="4294967295"/>
-          </p:nvPr>
-        </p:nvSpPr>
-        <p:spPr>
-          <a:xfrm>
-            <a:off x="27432" y="91440"/>
-            <a:ext cx="585216" cy="475488"/>
-          </a:xfrm>
-          <a:prstGeom prst="rect">
-            <a:avLst/>
-          </a:prstGeom>
-          <a:extLst>
-            <a:ext uri="{C572A759-6A51-4108-AA02-DFA0A04FC94B}">
-              <ma14:wrappingTextBoxFlag xmlns:ma14="http://schemas.microsoft.com/office/mac/drawingml/2011/main" val="0"/>
-            </a:ext>
-          </a:extLst>
-        </p:spPr>
-        <p:txBody>
-          <a:bodyPr/>
-          <a:lstStyle>
-            <a:lvl1pPr>
-              <a:defRPr sz="2000">
-                <a:solidFill>
-                  <a:srgbClr val="FFFFFF"/>
-                </a:solidFill>
-                <a:latin typeface="Calibri"/>
-                <a:ea typeface="Calibri"/>
-                <a:cs typeface="Calibri"/>
-              </a:defRPr>
-            </a:lvl1pPr>
-          </a:lstStyle>
-          <a:p>
-            <a:pPr algn="ctr"/>
-            <a:fld id="{F7021451-1387-4CA6-816F-3879F97B5CBC}" type="slidenum">
-              <a:rPr b="1" lang="en-US"/>
-              <a:t>52</a:t>
             </a:fld>
             <a:endParaRPr lang="en-US"/>
           </a:p>

--- a/lecons/F2T/20_S14_L5_P1_Sectors_Introduction.pptx
+++ b/lecons/F2T/20_S14_L5_P1_Sectors_Introduction.pptx
@@ -3456,7 +3456,7 @@
           <a:p>
             <a:r>
               <a:rPr lang="en-US" dirty="0"/>
-              <a:t>Before we start the new lesson, let us correct the homework I gave you at the end of Lesson 4 (Part 4): The Temperate Region: Problems Faced and Adaptations. The question was: List five jobs done by people in your family or neighbourhood (for example farmer, trader, teacher, mechanic, tailor). Take out your exercise books.</a:t>
+              <a:t>Before we start the new lesson, let us correct the homework I gave you at the end of Lesson 4 (Part 4): The Temperate Region: Problems Faced and Adaptations. The question was: Name the four sectors of the economy. Take out your exercise books.</a:t>
             </a:r>
             <a:endParaRPr lang="en-US" dirty="0"/>
           </a:p>
@@ -3984,7 +3984,7 @@
           <a:p>
             <a:r>
               <a:rPr lang="en-US" dirty="0"/>
-              <a:t>For your homework: Observe two workers in your area: one who works for a registered company and one who works alone in the street (for example a moto-taxi driver). Write one difference between them. We shall correct it at the beginning of our next lesson.</a:t>
+              <a:t>For your homework: Name the two sectors of work: registered and not registered. We shall correct it at the beginning of our next lesson.</a:t>
             </a:r>
             <a:endParaRPr lang="en-US" dirty="0"/>
           </a:p>
@@ -4424,7 +4424,7 @@
           <a:p>
             <a:r>
               <a:rPr lang="en-US" dirty="0"/>
-              <a:t>Here is a good answer. Examples: farmer, trader, teacher, mechanic, tailor, moto-taxi driver, nurse, carpenter. Compare it with your own answer and correct your work in red.</a:t>
+              <a:t>Here is a good answer. Primary, secondary, tertiary and quaternary. Compare it with your own answer and correct your work in red.</a:t>
             </a:r>
             <a:endParaRPr lang="en-US" dirty="0"/>
           </a:p>
@@ -14890,7 +14890,7 @@
         <p:spPr>
           <a:xfrm>
             <a:off x="0" y="658368"/>
-            <a:ext cx="3840480" cy="5833872"/>
+            <a:ext cx="5120640" cy="5833872"/>
           </a:xfrm>
           <a:prstGeom prst="rect">
             <a:avLst/>
@@ -14905,8 +14905,8 @@
         </p:nvSpPr>
         <p:spPr>
           <a:xfrm>
-            <a:off x="4069080" y="1005840"/>
-            <a:ext cx="7802575" cy="731520"/>
+            <a:off x="5349240" y="1005840"/>
+            <a:ext cx="6522415" cy="731520"/>
           </a:xfrm>
           <a:prstGeom prst="rect">
             <a:avLst/>
@@ -14946,8 +14946,8 @@
         </p:nvSpPr>
         <p:spPr>
           <a:xfrm>
-            <a:off x="4069080" y="1783080"/>
-            <a:ext cx="7802575" cy="4663440"/>
+            <a:off x="5349240" y="1783080"/>
+            <a:ext cx="6522415" cy="4663440"/>
           </a:xfrm>
           <a:prstGeom prst="rect">
             <a:avLst/>
@@ -14994,7 +14994,7 @@
                 <a:ea typeface="Times New Roman" pitchFamily="34" charset="-122"/>
                 <a:cs typeface="Times New Roman" pitchFamily="34" charset="-120"/>
               </a:rPr>
-              <a:t>List five jobs done by people in your family or neighbourhood (for example farmer, trader, teacher, mechanic, tailor).</a:t>
+              <a:t>Name the four sectors of the economy.</a:t>
             </a:r>
             <a:endParaRPr lang="en-US" sz="4000" dirty="0"/>
           </a:p>
@@ -16374,7 +16374,7 @@
                 <a:ea typeface="Times New Roman" pitchFamily="34" charset="-122"/>
                 <a:cs typeface="Times New Roman" pitchFamily="34" charset="-120"/>
               </a:rPr>
-              <a:t>Observe two workers in your area: one who works for a registered company and one who works alone in the street (for example a moto-taxi driver). Write one difference between them.</a:t>
+              <a:t>Name the two sectors of work: registered and not registered.</a:t>
             </a:r>
             <a:endParaRPr lang="en-US" sz="4000" dirty="0"/>
           </a:p>
@@ -19314,7 +19314,7 @@
                           <a:ea typeface="Calibri" pitchFamily="34" charset="-122"/>
                           <a:cs typeface="Calibri" pitchFamily="34" charset="-120"/>
                         </a:rPr>
-                        <a:t>Observe two workers in your area: one who works for a registered company and one who works alone in the street (for example a moto-taxi driver). Write one difference between them.</a:t>
+                        <a:t>Name the two sectors of work: registered and not registered.</a:t>
                       </a:r>
                       <a:endParaRPr lang="en-US" sz="1600" dirty="0">
                         <a:latin typeface="Calibri" charset="0"/>
@@ -19859,7 +19859,7 @@
                 <a:ea typeface="Times New Roman" pitchFamily="34" charset="-122"/>
                 <a:cs typeface="Times New Roman" pitchFamily="34" charset="-120"/>
               </a:rPr>
-              <a:t>Examples: farmer, trader, teacher, mechanic, tailor, moto-taxi driver, nurse, carpenter.</a:t>
+              <a:t>Primary, secondary, tertiary and quaternary.</a:t>
             </a:r>
             <a:endParaRPr lang="en-US" sz="4000" dirty="0"/>
           </a:p>
